--- a/nsut_deck.pptx
+++ b/nsut_deck.pptx
@@ -5566,8 +5566,8 @@
           <p:nvPr/>
         </p:nvGraphicFramePr>
         <p:xfrm>
-          <a:off x="3278188" y="4454525"/>
-          <a:ext cx="5635625" cy="1854200"/>
+          <a:off x="3278188" y="4224528"/>
+          <a:ext cx="5635625" cy="1828800"/>
         </p:xfrm>
         <a:graphic>
           <a:graphicData uri="http://schemas.openxmlformats.org/drawingml/2006/table">
@@ -5591,7 +5591,7 @@
                   </a:extLst>
                 </a:gridCol>
               </a:tblGrid>
-              <a:tr h="370840">
+              <a:tr h="365760">
                 <a:tc>
                   <a:txBody>
                     <a:bodyPr/>
@@ -5599,7 +5599,7 @@
                     <a:p>
                       <a:r>
                         <a:rPr lang="en-IN" dirty="0"/>
-                        <a:t>&lt;ROLL NO.&gt;</a:t>
+                        <a:t>2023UIC3633</a:t>
                       </a:r>
                     </a:p>
                   </a:txBody>
@@ -5612,7 +5612,7 @@
                     <a:p>
                       <a:r>
                         <a:rPr lang="en-IN" dirty="0"/>
-                        <a:t>NAVTESH MAKEN</a:t>
+                        <a:t>VEDNASH SINGHAL</a:t>
                       </a:r>
                     </a:p>
                   </a:txBody>
@@ -5624,7 +5624,7 @@
                   </a:ext>
                 </a:extLst>
               </a:tr>
-              <a:tr h="370840">
+              <a:tr h="365760">
                 <a:tc>
                   <a:txBody>
                     <a:bodyPr/>
@@ -5632,7 +5632,7 @@
                     <a:p>
                       <a:r>
                         <a:rPr lang="en-IN" dirty="0"/>
-                        <a:t/>
+                        <a:t>2023UIC3641</a:t>
                       </a:r>
                     </a:p>
                   </a:txBody>
@@ -5645,7 +5645,7 @@
                     <a:p>
                       <a:r>
                         <a:rPr lang="en-IN" dirty="0"/>
-                        <a:t/>
+                        <a:t>NAVTESH MAKEN</a:t>
                       </a:r>
                     </a:p>
                   </a:txBody>
@@ -5657,7 +5657,7 @@
                   </a:ext>
                 </a:extLst>
               </a:tr>
-              <a:tr h="370840">
+              <a:tr h="365760">
                 <a:tc>
                   <a:txBody>
                     <a:bodyPr/>
@@ -5665,7 +5665,7 @@
                     <a:p>
                       <a:r>
                         <a:rPr lang="en-IN" dirty="0"/>
-                        <a:t/>
+                        <a:t>2023UIC4138</a:t>
                       </a:r>
                     </a:p>
                   </a:txBody>
@@ -5678,7 +5678,7 @@
                     <a:p>
                       <a:r>
                         <a:rPr lang="en-IN" dirty="0"/>
-                        <a:t/>
+                        <a:t>ADITYA AGARWAAL</a:t>
                       </a:r>
                     </a:p>
                   </a:txBody>
@@ -5690,7 +5690,7 @@
                   </a:ext>
                 </a:extLst>
               </a:tr>
-              <a:tr h="370840">
+              <a:tr h="365760">
                 <a:tc>
                   <a:txBody>
                     <a:bodyPr/>
@@ -5698,7 +5698,7 @@
                     <a:p>
                       <a:r>
                         <a:rPr lang="en-IN" dirty="0"/>
-                        <a:t/>
+                        <a:t>2023UIC3600</a:t>
                       </a:r>
                     </a:p>
                   </a:txBody>
@@ -5711,7 +5711,7 @@
                     <a:p>
                       <a:r>
                         <a:rPr lang="en-IN" dirty="0"/>
-                        <a:t/>
+                        <a:t>TUSHAR SHARMA</a:t>
                       </a:r>
                     </a:p>
                   </a:txBody>
@@ -5723,14 +5723,12 @@
                   </a:ext>
                 </a:extLst>
               </a:tr>
-              <a:tr h="370840">
-                <a:tc>
-                  <a:txBody>
-                    <a:bodyPr/>
-                    <a:lstStyle/>
-                    <a:p>
-                      <a:endParaRPr lang="en-IN"/>
-                    </a:p>
+              <a:tr h="365760">
+                <a:tc>
+                  <a:txBody>
+                    <a:bodyPr/>
+                    <a:lstStyle/>
+                    <a:p/>
                   </a:txBody>
                   <a:tcPr marL="91415" marR="91415"/>
                 </a:tc>
@@ -5738,9 +5736,7 @@
                   <a:txBody>
                     <a:bodyPr/>
                     <a:lstStyle/>
-                    <a:p>
-                      <a:endParaRPr lang="en-IN" dirty="0"/>
-                    </a:p>
+                    <a:p/>
                   </a:txBody>
                   <a:tcPr marL="91415" marR="91415"/>
                 </a:tc>
@@ -5830,8 +5826,8 @@
         </p:nvSpPr>
         <p:spPr bwMode="auto">
           <a:xfrm>
-            <a:off x="1524000" y="6308725"/>
-            <a:ext cx="8696325" cy="512763"/>
+            <a:off x="1524000" y="5797296"/>
+            <a:ext cx="8696325" cy="1005840"/>
           </a:xfrm>
           <a:prstGeom prst="rect">
             <a:avLst/>
@@ -6020,6 +6016,26 @@
               </a:defRPr>
             </a:lvl9pPr>
           </a:lstStyle>
+          <a:p>
+            <a:pPr algn="ctr" eaLnBrk="1" hangingPunct="1">
+              <a:lnSpc>
+                <a:spcPct val="100000"/>
+              </a:lnSpc>
+              <a:spcBef>
+                <a:spcPct val="0"/>
+              </a:spcBef>
+              <a:buFont typeface="Arial" panose="020B0604020202020204" pitchFamily="34" charset="0"/>
+              <a:buNone/>
+            </a:pPr>
+            <a:r>
+              <a:rPr lang="en-US" altLang="en-US" sz="1200" b="1">
+                <a:solidFill>
+                  <a:srgbClr val="000000"/>
+                </a:solidFill>
+              </a:rPr>
+              <a:t>Under the supervision of Mrs. Asha Rani</a:t>
+            </a:r>
+          </a:p>
           <a:p>
             <a:pPr algn="ctr" eaLnBrk="1" hangingPunct="1">
               <a:lnSpc>
@@ -6282,7 +6298,7 @@
         <p:spPr>
           <a:xfrm>
             <a:off x="731520" y="1874519"/>
-            <a:ext cx="6035040" cy="665830"/>
+            <a:ext cx="6035040" cy="799437"/>
           </a:xfrm>
           <a:prstGeom prst="rect">
             <a:avLst/>
@@ -6306,7 +6322,7 @@
         <p:spPr>
           <a:xfrm>
             <a:off x="7223760" y="1828800"/>
-            <a:ext cx="4206240" cy="623846"/>
+            <a:ext cx="4206240" cy="678784"/>
           </a:xfrm>
           <a:prstGeom prst="rect">
             <a:avLst/>
@@ -6363,7 +6379,7 @@
         <p:spPr>
           <a:xfrm>
             <a:off x="731520" y="3429000"/>
-            <a:ext cx="5394960" cy="760522"/>
+            <a:ext cx="5394960" cy="913169"/>
           </a:xfrm>
           <a:prstGeom prst="rect">
             <a:avLst/>
@@ -6420,7 +6436,7 @@
         <p:spPr>
           <a:xfrm>
             <a:off x="731520" y="4709160"/>
-            <a:ext cx="5943600" cy="800888"/>
+            <a:ext cx="5943600" cy="843144"/>
           </a:xfrm>
           <a:prstGeom prst="rect">
             <a:avLst/>
@@ -6444,7 +6460,7 @@
         <p:spPr>
           <a:xfrm>
             <a:off x="7040880" y="4754880"/>
-            <a:ext cx="4297680" cy="856919"/>
+            <a:ext cx="4297680" cy="912574"/>
           </a:xfrm>
           <a:prstGeom prst="rect">
             <a:avLst/>
@@ -7581,7 +7597,7 @@
         <p:spPr>
           <a:xfrm>
             <a:off x="822960" y="4526280"/>
-            <a:ext cx="5760720" cy="1510863"/>
+            <a:ext cx="5760720" cy="1671637"/>
           </a:xfrm>
           <a:prstGeom prst="rect">
             <a:avLst/>
@@ -9187,7 +9203,7 @@
         <p:spPr>
           <a:xfrm>
             <a:off x="777240" y="2148840"/>
-            <a:ext cx="5120640" cy="2071859"/>
+            <a:ext cx="5120640" cy="2332332"/>
           </a:xfrm>
           <a:prstGeom prst="rect">
             <a:avLst/>
@@ -9211,7 +9227,7 @@
         <p:spPr>
           <a:xfrm>
             <a:off x="777240" y="4572000"/>
-            <a:ext cx="5394960" cy="1247204"/>
+            <a:ext cx="5394960" cy="1362169"/>
           </a:xfrm>
           <a:prstGeom prst="rect">
             <a:avLst/>
@@ -10723,7 +10739,7 @@
                     <a:p>
                       <a:r>
                         <a:rPr lang="en-IN" dirty="0"/>
-                        <a:t>&lt;ROLL NO.&gt;</a:t>
+                        <a:t>2023UIC3633</a:t>
                       </a:r>
                     </a:p>
                   </a:txBody>
@@ -10736,7 +10752,7 @@
                     <a:p>
                       <a:r>
                         <a:rPr lang="en-IN" dirty="0"/>
-                        <a:t>NAVTESH MAKEN</a:t>
+                        <a:t>VEDNASH SINGHAL</a:t>
                       </a:r>
                     </a:p>
                   </a:txBody>
@@ -10756,7 +10772,7 @@
                     <a:p>
                       <a:r>
                         <a:rPr lang="en-IN" dirty="0"/>
-                        <a:t/>
+                        <a:t>2023UIC3641</a:t>
                       </a:r>
                     </a:p>
                   </a:txBody>
@@ -10769,7 +10785,7 @@
                     <a:p>
                       <a:r>
                         <a:rPr lang="en-IN" dirty="0"/>
-                        <a:t/>
+                        <a:t>NAVTESH MAKEN</a:t>
                       </a:r>
                     </a:p>
                   </a:txBody>
@@ -10789,7 +10805,7 @@
                     <a:p>
                       <a:r>
                         <a:rPr lang="en-IN" dirty="0"/>
-                        <a:t/>
+                        <a:t>2023UIC4138</a:t>
                       </a:r>
                     </a:p>
                   </a:txBody>
@@ -10802,7 +10818,7 @@
                     <a:p>
                       <a:r>
                         <a:rPr lang="en-IN" dirty="0"/>
-                        <a:t/>
+                        <a:t>ADITYA AGARWAAL</a:t>
                       </a:r>
                     </a:p>
                   </a:txBody>
@@ -10822,7 +10838,7 @@
                     <a:p>
                       <a:r>
                         <a:rPr lang="en-IN" dirty="0"/>
-                        <a:t/>
+                        <a:t>2023UIC3600</a:t>
                       </a:r>
                     </a:p>
                   </a:txBody>
@@ -10835,7 +10851,7 @@
                     <a:p>
                       <a:r>
                         <a:rPr lang="en-IN" dirty="0"/>
-                        <a:t/>
+                        <a:t>TUSHAR SHARMA</a:t>
                       </a:r>
                     </a:p>
                   </a:txBody>
@@ -10852,9 +10868,7 @@
                   <a:txBody>
                     <a:bodyPr/>
                     <a:lstStyle/>
-                    <a:p>
-                      <a:endParaRPr lang="en-IN"/>
-                    </a:p>
+                    <a:p/>
                   </a:txBody>
                   <a:tcPr marL="91415" marR="91415"/>
                 </a:tc>
@@ -10862,9 +10876,7 @@
                   <a:txBody>
                     <a:bodyPr/>
                     <a:lstStyle/>
-                    <a:p>
-                      <a:endParaRPr lang="en-IN" dirty="0"/>
-                    </a:p>
+                    <a:p/>
                   </a:txBody>
                   <a:tcPr marL="91415" marR="91415"/>
                 </a:tc>
@@ -13352,240 +13364,6 @@
           </a:extLst>
         </p:spPr>
       </p:pic>
-      <p:sp>
-        <p:nvSpPr>
-          <p:cNvPr id="8198" name="TextBox 5">
-            <a:extLst>
-              <a:ext uri="{FF2B5EF4-FFF2-40B4-BE49-F238E27FC236}">
-                <a16:creationId xmlns:a16="http://schemas.microsoft.com/office/drawing/2014/main" id="{C25B6ED9-FA86-2D87-E468-2A4596F64EBD}"/>
-              </a:ext>
-            </a:extLst>
-          </p:cNvPr>
-          <p:cNvSpPr txBox="1">
-            <a:spLocks noChangeArrowheads="1"/>
-          </p:cNvSpPr>
-          <p:nvPr/>
-        </p:nvSpPr>
-        <p:spPr bwMode="auto">
-          <a:xfrm>
-            <a:off x="1485900" y="5213350"/>
-            <a:ext cx="9220200" cy="1016000"/>
-          </a:xfrm>
-          <a:prstGeom prst="rect">
-            <a:avLst/>
-          </a:prstGeom>
-          <a:noFill/>
-          <a:ln>
-            <a:noFill/>
-          </a:ln>
-          <a:extLst>
-            <a:ext uri="{909E8E84-426E-40DD-AFC4-6F175D3DCCD1}">
-              <a14:hiddenFill xmlns:a14="http://schemas.microsoft.com/office/drawing/2010/main">
-                <a:solidFill>
-                  <a:srgbClr val="FFFFFF"/>
-                </a:solidFill>
-              </a14:hiddenFill>
-            </a:ext>
-            <a:ext uri="{91240B29-F687-4F45-9708-019B960494DF}">
-              <a14:hiddenLine xmlns:a14="http://schemas.microsoft.com/office/drawing/2010/main" w="9525">
-                <a:solidFill>
-                  <a:srgbClr val="000000"/>
-                </a:solidFill>
-                <a:miter lim="800000"/>
-                <a:headEnd/>
-                <a:tailEnd/>
-              </a14:hiddenLine>
-            </a:ext>
-          </a:extLst>
-        </p:spPr>
-        <p:txBody>
-          <a:bodyPr>
-            <a:spAutoFit/>
-          </a:bodyPr>
-          <a:lstStyle>
-            <a:lvl1pPr>
-              <a:lnSpc>
-                <a:spcPct val="90000"/>
-              </a:lnSpc>
-              <a:spcBef>
-                <a:spcPts val="1000"/>
-              </a:spcBef>
-              <a:buFont typeface="Arial" panose="020B0604020202020204" pitchFamily="34" charset="0"/>
-              <a:buChar char="•"/>
-              <a:defRPr sz="2800">
-                <a:solidFill>
-                  <a:schemeClr val="tx1"/>
-                </a:solidFill>
-                <a:latin typeface="Calibri" panose="020F0502020204030204" pitchFamily="34" charset="0"/>
-              </a:defRPr>
-            </a:lvl1pPr>
-            <a:lvl2pPr marL="742950" indent="-285750">
-              <a:lnSpc>
-                <a:spcPct val="90000"/>
-              </a:lnSpc>
-              <a:spcBef>
-                <a:spcPts val="500"/>
-              </a:spcBef>
-              <a:buFont typeface="Arial" panose="020B0604020202020204" pitchFamily="34" charset="0"/>
-              <a:buChar char="•"/>
-              <a:defRPr sz="2400">
-                <a:solidFill>
-                  <a:schemeClr val="tx1"/>
-                </a:solidFill>
-                <a:latin typeface="Calibri" panose="020F0502020204030204" pitchFamily="34" charset="0"/>
-              </a:defRPr>
-            </a:lvl2pPr>
-            <a:lvl3pPr marL="1143000" indent="-228600">
-              <a:lnSpc>
-                <a:spcPct val="90000"/>
-              </a:lnSpc>
-              <a:spcBef>
-                <a:spcPts val="500"/>
-              </a:spcBef>
-              <a:buFont typeface="Arial" panose="020B0604020202020204" pitchFamily="34" charset="0"/>
-              <a:buChar char="•"/>
-              <a:defRPr sz="2000">
-                <a:solidFill>
-                  <a:schemeClr val="tx1"/>
-                </a:solidFill>
-                <a:latin typeface="Calibri" panose="020F0502020204030204" pitchFamily="34" charset="0"/>
-              </a:defRPr>
-            </a:lvl3pPr>
-            <a:lvl4pPr marL="1600200" indent="-228600">
-              <a:lnSpc>
-                <a:spcPct val="90000"/>
-              </a:lnSpc>
-              <a:spcBef>
-                <a:spcPts val="500"/>
-              </a:spcBef>
-              <a:buFont typeface="Arial" panose="020B0604020202020204" pitchFamily="34" charset="0"/>
-              <a:buChar char="•"/>
-              <a:defRPr>
-                <a:solidFill>
-                  <a:schemeClr val="tx1"/>
-                </a:solidFill>
-                <a:latin typeface="Calibri" panose="020F0502020204030204" pitchFamily="34" charset="0"/>
-              </a:defRPr>
-            </a:lvl4pPr>
-            <a:lvl5pPr marL="2057400" indent="-228600">
-              <a:lnSpc>
-                <a:spcPct val="90000"/>
-              </a:lnSpc>
-              <a:spcBef>
-                <a:spcPts val="500"/>
-              </a:spcBef>
-              <a:buFont typeface="Arial" panose="020B0604020202020204" pitchFamily="34" charset="0"/>
-              <a:buChar char="•"/>
-              <a:defRPr>
-                <a:solidFill>
-                  <a:schemeClr val="tx1"/>
-                </a:solidFill>
-                <a:latin typeface="Calibri" panose="020F0502020204030204" pitchFamily="34" charset="0"/>
-              </a:defRPr>
-            </a:lvl5pPr>
-            <a:lvl6pPr marL="2514600" indent="-228600" eaLnBrk="0" fontAlgn="base" hangingPunct="0">
-              <a:lnSpc>
-                <a:spcPct val="90000"/>
-              </a:lnSpc>
-              <a:spcBef>
-                <a:spcPts val="500"/>
-              </a:spcBef>
-              <a:spcAft>
-                <a:spcPct val="0"/>
-              </a:spcAft>
-              <a:buFont typeface="Arial" panose="020B0604020202020204" pitchFamily="34" charset="0"/>
-              <a:buChar char="•"/>
-              <a:defRPr>
-                <a:solidFill>
-                  <a:schemeClr val="tx1"/>
-                </a:solidFill>
-                <a:latin typeface="Calibri" panose="020F0502020204030204" pitchFamily="34" charset="0"/>
-              </a:defRPr>
-            </a:lvl6pPr>
-            <a:lvl7pPr marL="2971800" indent="-228600" eaLnBrk="0" fontAlgn="base" hangingPunct="0">
-              <a:lnSpc>
-                <a:spcPct val="90000"/>
-              </a:lnSpc>
-              <a:spcBef>
-                <a:spcPts val="500"/>
-              </a:spcBef>
-              <a:spcAft>
-                <a:spcPct val="0"/>
-              </a:spcAft>
-              <a:buFont typeface="Arial" panose="020B0604020202020204" pitchFamily="34" charset="0"/>
-              <a:buChar char="•"/>
-              <a:defRPr>
-                <a:solidFill>
-                  <a:schemeClr val="tx1"/>
-                </a:solidFill>
-                <a:latin typeface="Calibri" panose="020F0502020204030204" pitchFamily="34" charset="0"/>
-              </a:defRPr>
-            </a:lvl7pPr>
-            <a:lvl8pPr marL="3429000" indent="-228600" eaLnBrk="0" fontAlgn="base" hangingPunct="0">
-              <a:lnSpc>
-                <a:spcPct val="90000"/>
-              </a:lnSpc>
-              <a:spcBef>
-                <a:spcPts val="500"/>
-              </a:spcBef>
-              <a:spcAft>
-                <a:spcPct val="0"/>
-              </a:spcAft>
-              <a:buFont typeface="Arial" panose="020B0604020202020204" pitchFamily="34" charset="0"/>
-              <a:buChar char="•"/>
-              <a:defRPr>
-                <a:solidFill>
-                  <a:schemeClr val="tx1"/>
-                </a:solidFill>
-                <a:latin typeface="Calibri" panose="020F0502020204030204" pitchFamily="34" charset="0"/>
-              </a:defRPr>
-            </a:lvl8pPr>
-            <a:lvl9pPr marL="3886200" indent="-228600" eaLnBrk="0" fontAlgn="base" hangingPunct="0">
-              <a:lnSpc>
-                <a:spcPct val="90000"/>
-              </a:lnSpc>
-              <a:spcBef>
-                <a:spcPts val="500"/>
-              </a:spcBef>
-              <a:spcAft>
-                <a:spcPct val="0"/>
-              </a:spcAft>
-              <a:buFont typeface="Arial" panose="020B0604020202020204" pitchFamily="34" charset="0"/>
-              <a:buChar char="•"/>
-              <a:defRPr>
-                <a:solidFill>
-                  <a:schemeClr val="tx1"/>
-                </a:solidFill>
-                <a:latin typeface="Calibri" panose="020F0502020204030204" pitchFamily="34" charset="0"/>
-              </a:defRPr>
-            </a:lvl9pPr>
-          </a:lstStyle>
-          <a:p>
-            <a:pPr algn="ctr" eaLnBrk="1" hangingPunct="1">
-              <a:lnSpc>
-                <a:spcPct val="100000"/>
-              </a:lnSpc>
-              <a:spcBef>
-                <a:spcPct val="0"/>
-              </a:spcBef>
-              <a:buFontTx/>
-              <a:buNone/>
-            </a:pPr>
-            <a:r>
-              <a:rPr lang="en-IN" altLang="en-US" sz="2000" i="1"/>
-              <a:t>You may also include </a:t>
-            </a:r>
-            <a:r>
-              <a:rPr lang="en-IN" altLang="en-US" sz="2000" b="1" i="1"/>
-              <a:t>Scope and limitations</a:t>
-            </a:r>
-            <a:r>
-              <a:rPr lang="en-IN" altLang="en-US" sz="2000" i="1"/>
-              <a:t>: This should explain the scope of the research project, including what will be included and excluded from the study. It should also outline any limitations that may affect the study's ability to achieve its objectives.</a:t>
-            </a:r>
-          </a:p>
-        </p:txBody>
-      </p:sp>
     </p:spTree>
   </p:cSld>
   <p:clrMapOvr>
@@ -14221,7 +13999,7 @@
         <p:spPr>
           <a:xfrm>
             <a:off x="1234440" y="2743200"/>
-            <a:ext cx="5669280" cy="445357"/>
+            <a:ext cx="5669280" cy="506185"/>
           </a:xfrm>
           <a:prstGeom prst="rect">
             <a:avLst/>
@@ -14245,7 +14023,7 @@
         <p:spPr>
           <a:xfrm>
             <a:off x="7635240" y="2606040"/>
-            <a:ext cx="2743200" cy="840712"/>
+            <a:ext cx="2743200" cy="917154"/>
           </a:xfrm>
           <a:prstGeom prst="rect">
             <a:avLst/>
@@ -14269,7 +14047,7 @@
         <p:spPr>
           <a:xfrm>
             <a:off x="1234440" y="3977639"/>
-            <a:ext cx="7498079" cy="1481973"/>
+            <a:ext cx="7498079" cy="1625120"/>
           </a:xfrm>
           <a:prstGeom prst="rect">
             <a:avLst/>
